--- a/dist/초1/체육·보건·안전/몸과마음/초1_체육·보건·안전_몸과마음_01_손씻기와몸의경계.pptx
+++ b/dist/초1/체육·보건·안전/몸과마음/초1_체육·보건·안전_몸과마음_01_손씻기와몸의경계.pptx
@@ -120,13 +120,13 @@
   <p:extLst>
     <p:ext uri="{521415D9-36F7-43E2-AB2F-B90AF26B5E84}">
       <p14:sectionLst xmlns:p14="http://schemas.microsoft.com/office/powerpoint/2010/main">
-        <p14:section name="도입" id="{2fb651c0-7b38-805a-f58a-1c12867632b4}">
+        <p14:section name="도입" id="{bcd0c33d-f836-4287-eba7-e0794ae293bb}">
           <p14:sldIdLst>
             <p14:sldId id="256"/>
             <p14:sldId id="257"/>
           </p14:sldIdLst>
         </p14:section>
-        <p14:section name="개념" id="{d5f7d5eb-7bdf-c6eb-1dcc-5fc6b9f8e3fb}">
+        <p14:section name="개념" id="{c5d98e8c-6ffb-bfec-a9c8-2d02fa6b15d5}">
           <p14:sldIdLst>
             <p14:sldId id="258"/>
             <p14:sldId id="259"/>
@@ -135,37 +135,37 @@
             <p14:sldId id="264"/>
           </p14:sldIdLst>
         </p14:section>
-        <p14:section name="연습" id="{4e0e06e3-5fd9-5019-ec71-9b51f84a34fd}">
+        <p14:section name="연습" id="{aa47a04a-aa5a-2dd0-9739-5b780ee9aebf}">
           <p14:sldIdLst>
             <p14:sldId id="260"/>
             <p14:sldId id="262"/>
             <p14:sldId id="265"/>
           </p14:sldIdLst>
         </p14:section>
-        <p14:section name="개념" id="{b4983dbe-343f-9343-b229-c58dcce65cf3}">
+        <p14:section name="개념" id="{149a4104-a724-1dd8-8114-61c556c0afb2}">
           <p14:sldIdLst/>
         </p14:section>
-        <p14:section name="연습" id="{cef7d583-9ebd-cedf-51b7-7d0298aff5c0}">
+        <p14:section name="연습" id="{ae51d146-2af4-19af-90e2-2b623ec42d66}">
           <p14:sldIdLst/>
         </p14:section>
-        <p14:section name="개념" id="{cb5b41d4-6431-79fc-b67c-a4db5f27e327}">
+        <p14:section name="개념" id="{7d9d65f0-2b27-a9a1-4bfb-c9db4f0f13b2}">
           <p14:sldIdLst/>
         </p14:section>
-        <p14:section name="연습" id="{3497feb9-8281-767c-9422-65c1aadb58f4}">
+        <p14:section name="연습" id="{c635dc2e-7e0e-f39c-2a3f-0e32112ae335}">
           <p14:sldIdLst/>
         </p14:section>
-        <p14:section name="확인" id="{c8d7fe02-140b-9686-e376-cfa842f19b89}">
+        <p14:section name="확인" id="{da24ec15-bd64-8fe6-dbdd-8c757ce9b55a}">
           <p14:sldIdLst>
             <p14:sldId id="266"/>
             <p14:sldId id="267"/>
           </p14:sldIdLst>
         </p14:section>
-        <p14:section name="정리" id="{86bb3f89-1098-f514-d31a-c7fa55e8e3fa}">
+        <p14:section name="정리" id="{19f0cb6a-2865-0d28-fd91-0eaa115881b1}">
           <p14:sldIdLst>
             <p14:sldId id="268"/>
           </p14:sldIdLst>
         </p14:section>
-        <p14:section name="보충" id="{54d04e3e-2e14-ce90-35a7-c5757b332332}">
+        <p14:section name="보충" id="{66867753-cfbe-1052-f479-ad0cb527b72e}">
           <p14:sldIdLst>
             <p14:sldId id="269"/>
           </p14:sldIdLst>
